--- a/Docs/2048_presentation.pptx
+++ b/Docs/2048_presentation.pptx
@@ -15690,7 +15690,7 @@
         <p:spPr>
           <a:xfrm>
             <a:off x="1022400" y="6600000"/>
-            <a:ext cx="16243200" cy="3231654"/>
+            <a:ext cx="16243200" cy="2154436"/>
           </a:xfrm>
           <a:prstGeom prst="rect">
             <a:avLst/>
@@ -15718,34 +15718,7 @@
               </a:spcAft>
               <a:buNone/>
             </a:pPr>
-            <a:r>
-              <a:rPr lang="en-US" sz="2800" b="0" i="0" u="none" strike="noStrike" cap="none" dirty="0">
-                <a:solidFill>
-                  <a:srgbClr val="FFFFFF"/>
-                </a:solidFill>
-                <a:latin typeface="Questrial"/>
-                <a:ea typeface="Questrial"/>
-                <a:cs typeface="Questrial"/>
-                <a:sym typeface="Questrial"/>
-              </a:rPr>
-              <a:t>Self-play training with learning on: mean score and share of games reaching each tile, 200,000 games in 47 minutes on one CPU core</a:t>
-            </a:r>
-            <a:endParaRPr sz="2800" dirty="0"/>
-          </a:p>
-          <a:p>
-            <a:pPr marL="0" marR="0" lvl="0" indent="0" algn="l" rtl="0">
-              <a:lnSpc>
-                <a:spcPct val="124985"/>
-              </a:lnSpc>
-              <a:spcBef>
-                <a:spcPts val="0"/>
-              </a:spcBef>
-              <a:spcAft>
-                <a:spcPts val="0"/>
-              </a:spcAft>
-              <a:buNone/>
-            </a:pPr>
-            <a:endParaRPr sz="1400" dirty="0"/>
+            <a:endParaRPr lang="hr-BA" sz="1400" dirty="0"/>
           </a:p>
           <a:p>
             <a:pPr marL="0" marR="0" lvl="0" indent="0" algn="l" rtl="0">
@@ -15770,7 +15743,55 @@
                 <a:cs typeface="Questrial"/>
                 <a:sym typeface="Questrial"/>
               </a:rPr>
-              <a:t>Measured afterwards on 300 games with learning off: mean 91,304, best game 173,236, 2048 in 95%, 4096 in 83%, 8192 in 44%</a:t>
+              <a:t>Measured </a:t>
+            </a:r>
+            <a:r>
+              <a:rPr lang="hr-BA" sz="2800" b="0" i="0" u="none" strike="noStrike" cap="none" dirty="0">
+                <a:solidFill>
+                  <a:srgbClr val="FFFFFF"/>
+                </a:solidFill>
+                <a:latin typeface="Questrial"/>
+                <a:ea typeface="Questrial"/>
+                <a:cs typeface="Questrial"/>
+                <a:sym typeface="Questrial"/>
+              </a:rPr>
+              <a:t>self-play </a:t>
+            </a:r>
+            <a:r>
+              <a:rPr lang="en-US" sz="2800" b="0" i="0" u="none" strike="noStrike" cap="none" dirty="0">
+                <a:solidFill>
+                  <a:srgbClr val="FFFFFF"/>
+                </a:solidFill>
+                <a:latin typeface="Questrial"/>
+                <a:ea typeface="Questrial"/>
+                <a:cs typeface="Questrial"/>
+                <a:sym typeface="Questrial"/>
+              </a:rPr>
+              <a:t>after</a:t>
+            </a:r>
+            <a:r>
+              <a:rPr lang="hr-BA" sz="2800" b="0" i="0" u="none" strike="noStrike" cap="none" dirty="0">
+                <a:solidFill>
+                  <a:srgbClr val="FFFFFF"/>
+                </a:solidFill>
+                <a:latin typeface="Questrial"/>
+                <a:ea typeface="Questrial"/>
+                <a:cs typeface="Questrial"/>
+                <a:sym typeface="Questrial"/>
+              </a:rPr>
+              <a:t> training</a:t>
+            </a:r>
+            <a:r>
+              <a:rPr lang="en-US" sz="2800" b="0" i="0" u="none" strike="noStrike" cap="none" dirty="0">
+                <a:solidFill>
+                  <a:srgbClr val="FFFFFF"/>
+                </a:solidFill>
+                <a:latin typeface="Questrial"/>
+                <a:ea typeface="Questrial"/>
+                <a:cs typeface="Questrial"/>
+                <a:sym typeface="Questrial"/>
+              </a:rPr>
+              <a:t> on 300 games with learning off: mean 91,304, best game 173,236, 2048 in 95%, 4096 in 83%, 8192 in 44%</a:t>
             </a:r>
             <a:endParaRPr sz="2800" dirty="0"/>
           </a:p>
